--- a/1.1 JD+ Overview.pptx
+++ b/1.1 JD+ Overview.pptx
@@ -275,7 +275,7 @@
       <p15:notesGuideLst xmlns:p15="http://schemas.microsoft.com/office/powerpoint/2012/main"/>
     </p:ext>
     <p:ext uri="http://customooxmlschemas.google.com/">
-      <go:slidesCustomData xmlns="" xmlns:go="http://customooxmlschemas.google.com/" xmlns:ahyp="http://schemas.microsoft.com/office/drawing/2018/hyperlinkcolor" xmlns:p15="http://schemas.microsoft.com/office/powerpoint/2012/main" xmlns:p14="http://schemas.microsoft.com/office/powerpoint/2010/main" xmlns:com="http://schemas.openxmlformats.org/drawingml/2006/compatibility" xmlns:pvml="urn:schemas-microsoft-com:office:powerpoint" xmlns:v="urn:schemas-microsoft-com:vml" xmlns:o="urn:schemas-microsoft-com:office:office" xmlns:dgm="http://schemas.openxmlformats.org/drawingml/2006/diagram" xmlns:c="http://schemas.openxmlformats.org/drawingml/2006/chart" xmlns:mv="urn:schemas-microsoft-com:mac:vml" xmlns:mc="http://schemas.openxmlformats.org/markup-compatibility/2006" r:id="rId59" roundtripDataSignature="AMtx7mh3YP3xexYcFoahXa2ehi0H5V4Zaw=="/>
+      <go:slidesCustomData xmlns:mc="http://schemas.openxmlformats.org/markup-compatibility/2006" xmlns:mv="urn:schemas-microsoft-com:mac:vml" xmlns:c="http://schemas.openxmlformats.org/drawingml/2006/chart" xmlns:dgm="http://schemas.openxmlformats.org/drawingml/2006/diagram" xmlns:o="urn:schemas-microsoft-com:office:office" xmlns:v="urn:schemas-microsoft-com:vml" xmlns:pvml="urn:schemas-microsoft-com:office:powerpoint" xmlns:com="http://schemas.openxmlformats.org/drawingml/2006/compatibility" xmlns:p14="http://schemas.microsoft.com/office/powerpoint/2010/main" xmlns:p15="http://schemas.microsoft.com/office/powerpoint/2012/main" xmlns:ahyp="http://schemas.microsoft.com/office/drawing/2018/hyperlinkcolor" xmlns:go="http://customooxmlschemas.google.com/" xmlns="" r:id="rId59" roundtripDataSignature="AMtx7mh3YP3xexYcFoahXa2ehi0H5V4Zaw=="/>
     </p:ext>
   </p:extLst>
 </p:presentation>
@@ -375,7 +375,7 @@
           <a:p>
             <a:fld id="{0CBFB8CE-488C-4A7E-87F2-3AF6127C51C1}" type="datetimeFigureOut">
               <a:rPr lang="en-IE" smtClean="0"/>
-              <a:t>27/08/2026</a:t>
+              <a:t>22/09/2026</a:t>
             </a:fld>
             <a:endParaRPr lang="en-IE"/>
           </a:p>
@@ -6532,14 +6532,14 @@
           <a:p>
             <a:pPr lvl="1"/>
             <a:r>
-              <a:rPr lang="en-GB" sz="2400" dirty="0"/>
+              <a:rPr lang="en-GB" dirty="0"/>
               <a:t>General</a:t>
             </a:r>
           </a:p>
           <a:p>
             <a:pPr lvl="1"/>
             <a:r>
-              <a:rPr lang="en-GB" sz="2400" dirty="0"/>
+              <a:rPr lang="en-GB" dirty="0"/>
               <a:t>For seasonal adjustment (SA)</a:t>
             </a:r>
           </a:p>
@@ -7654,95 +7654,67 @@
         <p:spPr/>
         <p:txBody>
           <a:bodyPr>
-            <a:normAutofit fontScale="47500" lnSpcReduction="20000"/>
+            <a:normAutofit fontScale="77500" lnSpcReduction="20000"/>
           </a:bodyPr>
           <a:lstStyle/>
           <a:p>
             <a:r>
-              <a:rPr lang="en-GB" dirty="0"/>
+              <a:rPr lang="en-GB" sz="3100" dirty="0"/>
               <a:t>Java implementation of the leading algorithms</a:t>
             </a:r>
           </a:p>
           <a:p>
             <a:pPr lvl="1"/>
             <a:r>
-              <a:rPr lang="en-GB" dirty="0" err="1"/>
-              <a:t>Tramo</a:t>
-            </a:r>
-            <a:r>
-              <a:rPr lang="en-GB" dirty="0"/>
-              <a:t>-Seats, X12-ARIMA...</a:t>
-            </a:r>
-          </a:p>
-          <a:p>
-            <a:r>
-              <a:rPr lang="en-GB" dirty="0"/>
-              <a:t> Flexible design</a:t>
+              <a:rPr lang="en-GB" sz="2600" dirty="0"/>
+              <a:t>TRAMO-SEATS, X12-ARIMA...</a:t>
+            </a:r>
+          </a:p>
+          <a:p>
+            <a:r>
+              <a:rPr lang="en-GB" sz="3200" dirty="0"/>
+              <a:t> </a:t>
+            </a:r>
+            <a:r>
+              <a:rPr lang="en-GB" sz="3100" dirty="0"/>
+              <a:t>Flexible design</a:t>
             </a:r>
           </a:p>
           <a:p>
             <a:pPr lvl="1"/>
             <a:r>
-              <a:rPr lang="en-GB" dirty="0"/>
+              <a:rPr lang="en-GB" sz="2600" dirty="0"/>
               <a:t>Easier modifications of the core engines</a:t>
             </a:r>
           </a:p>
           <a:p>
             <a:pPr lvl="1"/>
             <a:r>
-              <a:rPr lang="en-GB" dirty="0"/>
+              <a:rPr lang="en-GB" sz="2600" dirty="0"/>
               <a:t>Developments of additional tools/algorithms</a:t>
             </a:r>
           </a:p>
           <a:p>
-            <a:endParaRPr lang="en-GB" dirty="0"/>
-          </a:p>
-          <a:p>
-            <a:r>
-              <a:rPr lang="en-GB" dirty="0"/>
+            <a:endParaRPr lang="en-GB" sz="3000" dirty="0"/>
+          </a:p>
+          <a:p>
+            <a:r>
+              <a:rPr lang="en-GB" sz="3100" dirty="0"/>
               <a:t>Challenge</a:t>
             </a:r>
           </a:p>
           <a:p>
             <a:pPr lvl="1"/>
             <a:r>
-              <a:rPr lang="en-GB" dirty="0"/>
-              <a:t>Keeping</a:t>
-            </a:r>
-          </a:p>
-          <a:p>
-            <a:pPr lvl="2"/>
-            <a:r>
-              <a:rPr lang="en-GB" dirty="0"/>
-              <a:t> similar results</a:t>
-            </a:r>
-          </a:p>
-          <a:p>
-            <a:pPr lvl="2"/>
-            <a:r>
-              <a:rPr lang="en-GB" dirty="0"/>
-              <a:t>high performances</a:t>
+              <a:rPr lang="en-GB" sz="2600" dirty="0"/>
+              <a:t>Keeping  similar results and high performances</a:t>
             </a:r>
           </a:p>
           <a:p>
             <a:pPr lvl="1"/>
             <a:r>
-              <a:rPr lang="en-GB" dirty="0"/>
-              <a:t>with </a:t>
-            </a:r>
-          </a:p>
-          <a:p>
-            <a:pPr lvl="2"/>
-            <a:r>
-              <a:rPr lang="en-GB" dirty="0"/>
-              <a:t>flexible (more general) design and algorithms</a:t>
-            </a:r>
-          </a:p>
-          <a:p>
-            <a:pPr lvl="2"/>
-            <a:r>
-              <a:rPr lang="en-GB" dirty="0"/>
-              <a:t>slower technical solution</a:t>
+              <a:rPr lang="en-GB" sz="2600" dirty="0"/>
+              <a:t>with flexible (more general) design and algorithms and slower technical solution</a:t>
             </a:r>
           </a:p>
           <a:p>
@@ -8082,130 +8054,6 @@
                                   </p:childTnLst>
                                 </p:cTn>
                               </p:par>
-                              <p:par>
-                                <p:cTn id="25" presetID="1" presetClass="entr" presetSubtype="0" fill="hold" grpId="0" nodeType="withEffect">
-                                  <p:stCondLst>
-                                    <p:cond delay="0"/>
-                                  </p:stCondLst>
-                                  <p:childTnLst>
-                                    <p:set>
-                                      <p:cBhvr>
-                                        <p:cTn id="26" dur="1" fill="hold">
-                                          <p:stCondLst>
-                                            <p:cond delay="0"/>
-                                          </p:stCondLst>
-                                        </p:cTn>
-                                        <p:tgtEl>
-                                          <p:spTgt spid="3">
-                                            <p:txEl>
-                                              <p:pRg st="9" end="9"/>
-                                            </p:txEl>
-                                          </p:spTgt>
-                                        </p:tgtEl>
-                                        <p:attrNameLst>
-                                          <p:attrName>style.visibility</p:attrName>
-                                        </p:attrNameLst>
-                                      </p:cBhvr>
-                                      <p:to>
-                                        <p:strVal val="visible"/>
-                                      </p:to>
-                                    </p:set>
-                                  </p:childTnLst>
-                                </p:cTn>
-                              </p:par>
-                              <p:par>
-                                <p:cTn id="27" presetID="1" presetClass="entr" presetSubtype="0" fill="hold" grpId="0" nodeType="withEffect">
-                                  <p:stCondLst>
-                                    <p:cond delay="0"/>
-                                  </p:stCondLst>
-                                  <p:childTnLst>
-                                    <p:set>
-                                      <p:cBhvr>
-                                        <p:cTn id="28" dur="1" fill="hold">
-                                          <p:stCondLst>
-                                            <p:cond delay="0"/>
-                                          </p:stCondLst>
-                                        </p:cTn>
-                                        <p:tgtEl>
-                                          <p:spTgt spid="3">
-                                            <p:txEl>
-                                              <p:pRg st="10" end="10"/>
-                                            </p:txEl>
-                                          </p:spTgt>
-                                        </p:tgtEl>
-                                        <p:attrNameLst>
-                                          <p:attrName>style.visibility</p:attrName>
-                                        </p:attrNameLst>
-                                      </p:cBhvr>
-                                      <p:to>
-                                        <p:strVal val="visible"/>
-                                      </p:to>
-                                    </p:set>
-                                  </p:childTnLst>
-                                </p:cTn>
-                              </p:par>
-                              <p:par>
-                                <p:cTn id="29" presetID="1" presetClass="entr" presetSubtype="0" fill="hold" grpId="0" nodeType="withEffect">
-                                  <p:stCondLst>
-                                    <p:cond delay="0"/>
-                                  </p:stCondLst>
-                                  <p:childTnLst>
-                                    <p:set>
-                                      <p:cBhvr>
-                                        <p:cTn id="30" dur="1" fill="hold">
-                                          <p:stCondLst>
-                                            <p:cond delay="0"/>
-                                          </p:stCondLst>
-                                        </p:cTn>
-                                        <p:tgtEl>
-                                          <p:spTgt spid="3">
-                                            <p:txEl>
-                                              <p:pRg st="11" end="11"/>
-                                            </p:txEl>
-                                          </p:spTgt>
-                                        </p:tgtEl>
-                                        <p:attrNameLst>
-                                          <p:attrName>style.visibility</p:attrName>
-                                        </p:attrNameLst>
-                                      </p:cBhvr>
-                                      <p:to>
-                                        <p:strVal val="visible"/>
-                                      </p:to>
-                                    </p:set>
-                                  </p:childTnLst>
-                                </p:cTn>
-                              </p:par>
-                              <p:par>
-                                <p:cTn id="31" presetID="1" presetClass="entr" presetSubtype="0" fill="hold" grpId="0" nodeType="withEffect">
-                                  <p:stCondLst>
-                                    <p:cond delay="0"/>
-                                  </p:stCondLst>
-                                  <p:childTnLst>
-                                    <p:set>
-                                      <p:cBhvr>
-                                        <p:cTn id="32" dur="1" fill="hold">
-                                          <p:stCondLst>
-                                            <p:cond delay="0"/>
-                                          </p:stCondLst>
-                                        </p:cTn>
-                                        <p:tgtEl>
-                                          <p:spTgt spid="3">
-                                            <p:txEl>
-                                              <p:pRg st="12" end="12"/>
-                                            </p:txEl>
-                                          </p:spTgt>
-                                        </p:tgtEl>
-                                        <p:attrNameLst>
-                                          <p:attrName>style.visibility</p:attrName>
-                                        </p:attrNameLst>
-                                      </p:cBhvr>
-                                      <p:to>
-                                        <p:strVal val="visible"/>
-                                      </p:to>
-                                    </p:set>
-                                  </p:childTnLst>
-                                </p:cTn>
-                              </p:par>
                             </p:childTnLst>
                           </p:cTn>
                         </p:par>
@@ -8352,13 +8200,13 @@
         </p:nvSpPr>
         <p:spPr>
           <a:xfrm>
-            <a:off x="1775520" y="188641"/>
-            <a:ext cx="4320480" cy="663575"/>
+            <a:off x="1775519" y="188641"/>
+            <a:ext cx="5295131" cy="663575"/>
           </a:xfrm>
         </p:spPr>
         <p:txBody>
           <a:bodyPr>
-            <a:normAutofit fontScale="90000"/>
+            <a:normAutofit/>
           </a:bodyPr>
           <a:lstStyle/>
           <a:p>
@@ -9029,10 +8877,10 @@
       </p:sp>
       <p:pic>
         <p:nvPicPr>
-          <p:cNvPr id="9" name="Picture 8">
+          <p:cNvPr id="7" name="Image 6">
             <a:extLst>
               <a:ext uri="{FF2B5EF4-FFF2-40B4-BE49-F238E27FC236}">
-                <a16:creationId xmlns:a16="http://schemas.microsoft.com/office/drawing/2014/main" id="{0912689C-90CC-756F-0DF8-D42C9146B13A}"/>
+                <a16:creationId xmlns:a16="http://schemas.microsoft.com/office/drawing/2014/main" id="{7BE5CE50-EE39-E9F9-2C7D-664863F401F7}"/>
               </a:ext>
             </a:extLst>
           </p:cNvPr>
@@ -9049,17 +8897,12 @@
         </p:blipFill>
         <p:spPr>
           <a:xfrm>
-            <a:off x="2098250" y="1556793"/>
-            <a:ext cx="5542296" cy="3241587"/>
+            <a:off x="729076" y="1632637"/>
+            <a:ext cx="6653846" cy="3354034"/>
           </a:xfrm>
           <a:prstGeom prst="rect">
             <a:avLst/>
           </a:prstGeom>
-          <a:ln>
-            <a:solidFill>
-              <a:schemeClr val="tx1"/>
-            </a:solidFill>
-          </a:ln>
         </p:spPr>
       </p:pic>
     </p:spTree>
@@ -11057,7 +10900,7 @@
         </p:nvSpPr>
         <p:spPr>
           <a:xfrm>
-            <a:off x="1703512" y="28384"/>
+            <a:off x="1086824" y="-1087"/>
             <a:ext cx="8229600" cy="1143000"/>
           </a:xfrm>
         </p:spPr>
@@ -11088,7 +10931,9 @@
             <a:avLst/>
           </a:prstGeom>
           <a:solidFill>
-            <a:schemeClr val="accent1"/>
+            <a:schemeClr val="tx2">
+              <a:lumMod val="90000"/>
+            </a:schemeClr>
           </a:solidFill>
           <a:ln w="38100" cap="flat" cmpd="sng" algn="ctr">
             <a:solidFill>
@@ -11153,7 +10998,7 @@
         </p:nvSpPr>
         <p:spPr bwMode="auto">
           <a:xfrm>
-            <a:off x="8256240" y="993334"/>
+            <a:off x="9138742" y="993334"/>
             <a:ext cx="2232248" cy="2088232"/>
           </a:xfrm>
           <a:prstGeom prst="rect">
@@ -11386,7 +11231,7 @@
         <p:spPr bwMode="auto">
           <a:xfrm rot="10800000" flipV="1">
             <a:off x="5519936" y="2037450"/>
-            <a:ext cx="2736304" cy="275426"/>
+            <a:ext cx="3618806" cy="275426"/>
           </a:xfrm>
           <a:prstGeom prst="bentConnector2">
             <a:avLst/>
@@ -11673,8 +11518,8 @@
         </p:nvSpPr>
         <p:spPr bwMode="auto">
           <a:xfrm>
-            <a:off x="8260356" y="5229200"/>
-            <a:ext cx="2160240" cy="1008112"/>
+            <a:off x="9142857" y="5229200"/>
+            <a:ext cx="2245791" cy="1008112"/>
           </a:xfrm>
           <a:prstGeom prst="rect">
             <a:avLst/>
@@ -11808,6 +11653,7 @@
         <p:nvCxnSpPr>
           <p:cNvPr id="34" name="Elbow Connector 33"/>
           <p:cNvCxnSpPr>
+            <a:cxnSpLocks/>
             <a:stCxn id="32" idx="1"/>
             <a:endCxn id="19" idx="3"/>
           </p:cNvCxnSpPr>
@@ -11815,8 +11661,8 @@
         </p:nvCxnSpPr>
         <p:spPr bwMode="auto">
           <a:xfrm rot="10800000">
-            <a:off x="7680176" y="5373216"/>
-            <a:ext cx="580180" cy="360040"/>
+            <a:off x="7680177" y="5373216"/>
+            <a:ext cx="1462681" cy="360040"/>
           </a:xfrm>
           <a:prstGeom prst="bentConnector3">
             <a:avLst>
@@ -12177,7 +12023,7 @@
         </p:nvSpPr>
         <p:spPr bwMode="auto">
           <a:xfrm>
-            <a:off x="8273899" y="3185805"/>
+            <a:off x="9156401" y="3185805"/>
             <a:ext cx="2232248" cy="1908212"/>
           </a:xfrm>
           <a:prstGeom prst="rect">
@@ -12385,8 +12231,8 @@
         </p:nvCxnSpPr>
         <p:spPr bwMode="auto">
           <a:xfrm rot="10800000">
-            <a:off x="5735962" y="4139912"/>
-            <a:ext cx="2537939" cy="1"/>
+            <a:off x="5735961" y="4139911"/>
+            <a:ext cx="3420441" cy="1"/>
           </a:xfrm>
           <a:prstGeom prst="bentConnector3">
             <a:avLst>
@@ -14186,15 +14032,6 @@
 </file>
 
 <file path=customXml/item2.xml><?xml version="1.0" encoding="utf-8"?>
-<?mso-contentType ?>
-<FormTemplates xmlns="http://schemas.microsoft.com/sharepoint/v3/contenttype/forms">
-  <Display>DocumentLibraryForm</Display>
-  <Edit>DocumentLibraryForm</Edit>
-  <New>DocumentLibraryForm</New>
-</FormTemplates>
-</file>
-
-<file path=customXml/item3.xml><?xml version="1.0" encoding="utf-8"?>
 <ct:contentTypeSchema xmlns:ct="http://schemas.microsoft.com/office/2006/metadata/contentType" xmlns:ma="http://schemas.microsoft.com/office/2006/metadata/properties/metaAttributes" ct:_="" ma:_="" ma:contentTypeName="Document" ma:contentTypeID="0x010100E6AA5C57F8EADE4E9CD6BB064C0C3195" ma:contentTypeVersion="16" ma:contentTypeDescription="Create a new document." ma:contentTypeScope="" ma:versionID="bb51c19a58f458ddcddd050a07659236">
   <xsd:schema xmlns:xsd="http://www.w3.org/2001/XMLSchema" xmlns:xs="http://www.w3.org/2001/XMLSchema" xmlns:p="http://schemas.microsoft.com/office/2006/metadata/properties" xmlns:ns2="0e422b70-e85d-4377-8ee0-b6227433d381" xmlns:ns3="199f642e-5af9-486c-ac06-f366742ef41a" targetNamespace="http://schemas.microsoft.com/office/2006/metadata/properties" ma:root="true" ma:fieldsID="0ee7a3bac0352a48a43420936abd968a" ns2:_="" ns3:_="">
     <xsd:import namespace="0e422b70-e85d-4377-8ee0-b6227433d381"/>
@@ -14435,6 +14272,15 @@
 </ct:contentTypeSchema>
 </file>
 
+<file path=customXml/item3.xml><?xml version="1.0" encoding="utf-8"?>
+<?mso-contentType ?>
+<FormTemplates xmlns="http://schemas.microsoft.com/sharepoint/v3/contenttype/forms">
+  <Display>DocumentLibraryForm</Display>
+  <Edit>DocumentLibraryForm</Edit>
+  <New>DocumentLibraryForm</New>
+</FormTemplates>
+</file>
+
 <file path=customXml/itemProps1.xml><?xml version="1.0" encoding="utf-8"?>
 <ds:datastoreItem xmlns:ds="http://schemas.openxmlformats.org/officeDocument/2006/customXml" ds:itemID="{2D6C293B-B8B4-4284-A17E-9F9E4C32B25A}">
   <ds:schemaRefs>
@@ -14453,14 +14299,6 @@
 </file>
 
 <file path=customXml/itemProps2.xml><?xml version="1.0" encoding="utf-8"?>
-<ds:datastoreItem xmlns:ds="http://schemas.openxmlformats.org/officeDocument/2006/customXml" ds:itemID="{67DD9E9F-9EEB-4105-B29B-819486C2855A}">
-  <ds:schemaRefs>
-    <ds:schemaRef ds:uri="http://schemas.microsoft.com/sharepoint/v3/contenttype/forms"/>
-  </ds:schemaRefs>
-</ds:datastoreItem>
-</file>
-
-<file path=customXml/itemProps3.xml><?xml version="1.0" encoding="utf-8"?>
 <ds:datastoreItem xmlns:ds="http://schemas.openxmlformats.org/officeDocument/2006/customXml" ds:itemID="{04B464EA-1576-49DD-9675-1E3399D4D196}">
   <ds:schemaRefs>
     <ds:schemaRef ds:uri="http://schemas.microsoft.com/office/2006/metadata/contentType"/>
@@ -14477,4 +14315,12 @@
     <ds:schemaRef ds:uri="http://schemas.microsoft.com/internal/obd"/>
   </ds:schemaRefs>
 </ds:datastoreItem>
+</file>
+
+<file path=customXml/itemProps3.xml><?xml version="1.0" encoding="utf-8"?>
+<ds:datastoreItem xmlns:ds="http://schemas.openxmlformats.org/officeDocument/2006/customXml" ds:itemID="{67DD9E9F-9EEB-4105-B29B-819486C2855A}">
+  <ds:schemaRefs>
+    <ds:schemaRef ds:uri="http://schemas.microsoft.com/sharepoint/v3/contenttype/forms"/>
+  </ds:schemaRefs>
+</ds:datastoreItem>
 </file>
--- a/1.1 JD+ Overview.pptx
+++ b/1.1 JD+ Overview.pptx
@@ -275,7 +275,7 @@
       <p15:notesGuideLst xmlns:p15="http://schemas.microsoft.com/office/powerpoint/2012/main"/>
     </p:ext>
     <p:ext uri="http://customooxmlschemas.google.com/">
-      <go:slidesCustomData xmlns:mc="http://schemas.openxmlformats.org/markup-compatibility/2006" xmlns:mv="urn:schemas-microsoft-com:mac:vml" xmlns:c="http://schemas.openxmlformats.org/drawingml/2006/chart" xmlns:dgm="http://schemas.openxmlformats.org/drawingml/2006/diagram" xmlns:o="urn:schemas-microsoft-com:office:office" xmlns:v="urn:schemas-microsoft-com:vml" xmlns:pvml="urn:schemas-microsoft-com:office:powerpoint" xmlns:com="http://schemas.openxmlformats.org/drawingml/2006/compatibility" xmlns:p14="http://schemas.microsoft.com/office/powerpoint/2010/main" xmlns:p15="http://schemas.microsoft.com/office/powerpoint/2012/main" xmlns:ahyp="http://schemas.microsoft.com/office/drawing/2018/hyperlinkcolor" xmlns:go="http://customooxmlschemas.google.com/" xmlns="" r:id="rId59" roundtripDataSignature="AMtx7mh3YP3xexYcFoahXa2ehi0H5V4Zaw=="/>
+      <go:slidesCustomData xmlns="" xmlns:go="http://customooxmlschemas.google.com/" xmlns:ahyp="http://schemas.microsoft.com/office/drawing/2018/hyperlinkcolor" xmlns:p15="http://schemas.microsoft.com/office/powerpoint/2012/main" xmlns:p14="http://schemas.microsoft.com/office/powerpoint/2010/main" xmlns:com="http://schemas.openxmlformats.org/drawingml/2006/compatibility" xmlns:pvml="urn:schemas-microsoft-com:office:powerpoint" xmlns:v="urn:schemas-microsoft-com:vml" xmlns:o="urn:schemas-microsoft-com:office:office" xmlns:dgm="http://schemas.openxmlformats.org/drawingml/2006/diagram" xmlns:c="http://schemas.openxmlformats.org/drawingml/2006/chart" xmlns:mv="urn:schemas-microsoft-com:mac:vml" xmlns:mc="http://schemas.openxmlformats.org/markup-compatibility/2006" r:id="rId59" roundtripDataSignature="AMtx7mh3YP3xexYcFoahXa2ehi0H5V4Zaw=="/>
     </p:ext>
   </p:extLst>
 </p:presentation>
@@ -375,7 +375,7 @@
           <a:p>
             <a:fld id="{0CBFB8CE-488C-4A7E-87F2-3AF6127C51C1}" type="datetimeFigureOut">
               <a:rPr lang="en-IE" smtClean="0"/>
-              <a:t>22/09/2026</a:t>
+              <a:t>01/10/2026</a:t>
             </a:fld>
             <a:endParaRPr lang="en-IE"/>
           </a:p>
@@ -2480,8 +2480,8 @@
         </p:nvSpPr>
         <p:spPr>
           <a:xfrm>
-            <a:off x="970722" y="1901951"/>
-            <a:ext cx="10515597" cy="4194176"/>
+            <a:off x="970722" y="1388854"/>
+            <a:ext cx="10515597" cy="4707273"/>
           </a:xfrm>
         </p:spPr>
         <p:txBody>
@@ -4918,10 +4918,6 @@
           <a:bodyPr/>
           <a:lstStyle/>
           <a:p>
-            <a:r>
-              <a:rPr lang="en-US"/>
-              <a:t>15-17/10/2024</a:t>
-            </a:r>
             <a:endParaRPr lang="en-US" dirty="0"/>
           </a:p>
         </p:txBody>
@@ -5039,10 +5035,6 @@
           <a:bodyPr/>
           <a:lstStyle/>
           <a:p>
-            <a:r>
-              <a:rPr lang="en-US"/>
-              <a:t>15-17/10/2024</a:t>
-            </a:r>
             <a:endParaRPr lang="en-US" dirty="0"/>
           </a:p>
         </p:txBody>
@@ -5559,7 +5551,7 @@
     <p:sldLayoutId id="2147483728" r:id="rId6"/>
     <p:sldLayoutId id="2147483729" r:id="rId7"/>
   </p:sldLayoutIdLst>
-  <p:hf sldNum="0" hdr="0" dt="0"/>
+  <p:hf hdr="0" dt="0"/>
   <p:txStyles>
     <p:titleStyle>
       <a:defPPr marR="0" lvl="0" algn="l" rtl="0">
@@ -6325,6 +6317,10 @@
           <a:lstStyle/>
           <a:p>
             <a:r>
+              <a:rPr lang="fr-BE" dirty="0"/>
+              <a:t>1.1 </a:t>
+            </a:r>
+            <a:r>
               <a:rPr lang="fr-BE" dirty="0" err="1"/>
               <a:t>Overview</a:t>
             </a:r>
@@ -6441,6 +6437,36 @@
           </a:p>
         </p:txBody>
       </p:sp>
+      <p:sp>
+        <p:nvSpPr>
+          <p:cNvPr id="4" name="Espace réservé du numéro de diapositive 3">
+            <a:extLst>
+              <a:ext uri="{FF2B5EF4-FFF2-40B4-BE49-F238E27FC236}">
+                <a16:creationId xmlns:a16="http://schemas.microsoft.com/office/drawing/2014/main" id="{8E66203B-D61A-917C-CB80-1D87AD330CA3}"/>
+              </a:ext>
+            </a:extLst>
+          </p:cNvPr>
+          <p:cNvSpPr>
+            <a:spLocks noGrp="1"/>
+          </p:cNvSpPr>
+          <p:nvPr>
+            <p:ph type="sldNum" idx="12"/>
+          </p:nvPr>
+        </p:nvSpPr>
+        <p:spPr/>
+        <p:txBody>
+          <a:bodyPr/>
+          <a:lstStyle/>
+          <a:p>
+            <a:fld id="{00000000-1234-1234-1234-123412341234}" type="slidenum">
+              <a:rPr lang="en-GB" smtClean="0"/>
+              <a:pPr/>
+              <a:t>10</a:t>
+            </a:fld>
+            <a:endParaRPr lang="en-GB"/>
+          </a:p>
+        </p:txBody>
+      </p:sp>
     </p:spTree>
     <p:extLst>
       <p:ext uri="{BB962C8B-B14F-4D97-AF65-F5344CB8AC3E}">
@@ -6501,13 +6527,13 @@
             <a:spLocks noGrp="1"/>
           </p:cNvSpPr>
           <p:nvPr>
-            <p:ph idx="1"/>
+            <p:ph sz="half" idx="2"/>
           </p:nvPr>
         </p:nvSpPr>
         <p:spPr>
           <a:xfrm>
-            <a:off x="2063552" y="1556792"/>
-            <a:ext cx="8229600" cy="5112568"/>
+            <a:off x="970722" y="1275907"/>
+            <a:ext cx="10515597" cy="4820220"/>
           </a:xfrm>
         </p:spPr>
         <p:txBody>
@@ -6517,53 +6543,53 @@
           <a:lstStyle/>
           <a:p>
             <a:r>
-              <a:rPr lang="en-GB" dirty="0"/>
+              <a:rPr lang="en-GB" sz="2800" dirty="0"/>
               <a:t>Objectives of </a:t>
             </a:r>
             <a:r>
-              <a:rPr lang="en-GB" dirty="0" err="1"/>
+              <a:rPr lang="en-GB" sz="2800" dirty="0" err="1"/>
               <a:t>JDemetra</a:t>
             </a:r>
             <a:r>
-              <a:rPr lang="en-GB" dirty="0"/>
+              <a:rPr lang="en-GB" sz="2800" dirty="0"/>
               <a:t>+ (JD+)</a:t>
             </a:r>
           </a:p>
           <a:p>
             <a:pPr lvl="1"/>
             <a:r>
-              <a:rPr lang="en-GB" dirty="0"/>
+              <a:rPr lang="en-GB" sz="2400" dirty="0"/>
               <a:t>General</a:t>
             </a:r>
           </a:p>
           <a:p>
             <a:pPr lvl="1"/>
             <a:r>
-              <a:rPr lang="en-GB" dirty="0"/>
+              <a:rPr lang="en-GB" sz="2400" dirty="0"/>
               <a:t>For seasonal adjustment (SA)</a:t>
             </a:r>
           </a:p>
           <a:p>
             <a:r>
-              <a:rPr lang="en-GB" dirty="0"/>
+              <a:rPr lang="en-GB" sz="2800" dirty="0"/>
               <a:t>What is really JD+ ?</a:t>
             </a:r>
           </a:p>
           <a:p>
             <a:r>
-              <a:rPr lang="en-GB" dirty="0"/>
+              <a:rPr lang="en-GB" sz="2800" dirty="0"/>
               <a:t>Statistical content</a:t>
             </a:r>
           </a:p>
           <a:p>
             <a:r>
-              <a:rPr lang="en-GB" dirty="0"/>
+              <a:rPr lang="en-GB" sz="2800" dirty="0"/>
               <a:t>Seasonal adjustment framework</a:t>
             </a:r>
           </a:p>
           <a:p>
             <a:r>
-              <a:rPr lang="en-GB" dirty="0"/>
+              <a:rPr lang="en-GB" sz="2800" dirty="0"/>
               <a:t>Final remarks</a:t>
             </a:r>
           </a:p>
@@ -6579,7 +6605,40 @@
             <a:spLocks noGrp="1"/>
           </p:cNvSpPr>
           <p:nvPr>
-            <p:ph type="ftr" sz="quarter" idx="11"/>
+            <p:ph type="ftr" sz="quarter" idx="4294967295"/>
+          </p:nvPr>
+        </p:nvSpPr>
+        <p:spPr>
+          <a:xfrm>
+            <a:off x="0" y="0"/>
+            <a:ext cx="0" cy="0"/>
+          </a:xfrm>
+        </p:spPr>
+        <p:txBody>
+          <a:bodyPr/>
+          <a:lstStyle/>
+          <a:p>
+            <a:r>
+              <a:rPr lang="en-US"/>
+              <a:t>ESTP Training. JD+ Overview</a:t>
+            </a:r>
+          </a:p>
+        </p:txBody>
+      </p:sp>
+      <p:sp>
+        <p:nvSpPr>
+          <p:cNvPr id="4" name="Espace réservé du numéro de diapositive 3">
+            <a:extLst>
+              <a:ext uri="{FF2B5EF4-FFF2-40B4-BE49-F238E27FC236}">
+                <a16:creationId xmlns:a16="http://schemas.microsoft.com/office/drawing/2014/main" id="{8010C725-AD92-B5FD-39E6-ADD3BD54C367}"/>
+              </a:ext>
+            </a:extLst>
+          </p:cNvPr>
+          <p:cNvSpPr>
+            <a:spLocks noGrp="1"/>
+          </p:cNvSpPr>
+          <p:nvPr>
+            <p:ph type="sldNum" idx="12"/>
           </p:nvPr>
         </p:nvSpPr>
         <p:spPr/>
@@ -6587,10 +6646,12 @@
           <a:bodyPr/>
           <a:lstStyle/>
           <a:p>
-            <a:r>
-              <a:rPr lang="en-US"/>
-              <a:t>ESTP Training. JD+ Overview</a:t>
-            </a:r>
+            <a:fld id="{00000000-1234-1234-1234-123412341234}" type="slidenum">
+              <a:rPr lang="en-GB" smtClean="0"/>
+              <a:pPr/>
+              <a:t>2</a:t>
+            </a:fld>
+            <a:endParaRPr lang="en-GB"/>
           </a:p>
         </p:txBody>
       </p:sp>
@@ -6990,23 +7051,48 @@
       </p:sp>
       <p:sp>
         <p:nvSpPr>
+          <p:cNvPr id="4" name="Espace réservé du numéro de diapositive 3">
+            <a:extLst>
+              <a:ext uri="{FF2B5EF4-FFF2-40B4-BE49-F238E27FC236}">
+                <a16:creationId xmlns:a16="http://schemas.microsoft.com/office/drawing/2014/main" id="{2FA7F777-FB2E-93FD-4536-DA8DEB517D23}"/>
+              </a:ext>
+            </a:extLst>
+          </p:cNvPr>
+          <p:cNvSpPr>
+            <a:spLocks noGrp="1"/>
+          </p:cNvSpPr>
+          <p:nvPr>
+            <p:ph type="sldNum" idx="12"/>
+          </p:nvPr>
+        </p:nvSpPr>
+        <p:spPr/>
+        <p:txBody>
+          <a:bodyPr/>
+          <a:lstStyle/>
+          <a:p>
+            <a:fld id="{627CDA0C-01AE-4E2F-8829-AAF8EAAF9DB3}" type="slidenum">
+              <a:rPr lang="en-US" smtClean="0"/>
+              <a:pPr/>
+              <a:t>3</a:t>
+            </a:fld>
+            <a:endParaRPr lang="en-US" dirty="0"/>
+          </a:p>
+        </p:txBody>
+      </p:sp>
+      <p:sp>
+        <p:nvSpPr>
           <p:cNvPr id="3" name="Content Placeholder 2"/>
           <p:cNvSpPr>
             <a:spLocks noGrp="1"/>
           </p:cNvSpPr>
           <p:nvPr>
-            <p:ph idx="1"/>
+            <p:ph sz="half" idx="2"/>
           </p:nvPr>
         </p:nvSpPr>
-        <p:spPr>
-          <a:xfrm>
-            <a:off x="2135560" y="1700809"/>
-            <a:ext cx="8229600" cy="4525963"/>
-          </a:xfrm>
-        </p:spPr>
+        <p:spPr/>
         <p:txBody>
           <a:bodyPr>
-            <a:normAutofit fontScale="85000" lnSpcReduction="20000"/>
+            <a:normAutofit/>
           </a:bodyPr>
           <a:lstStyle/>
           <a:p>
@@ -7086,7 +7172,7 @@
             <a:pPr lvl="1"/>
             <a:r>
               <a:rPr lang="en-GB" dirty="0"/>
-              <a:t>Open source solution</a:t>
+              <a:t>Open-source solution</a:t>
             </a:r>
           </a:p>
           <a:p>
@@ -7101,16 +7187,21 @@
             <a:spLocks noGrp="1"/>
           </p:cNvSpPr>
           <p:nvPr>
-            <p:ph type="ftr" sz="quarter" idx="11"/>
+            <p:ph type="ftr" sz="quarter" idx="4294967295"/>
           </p:nvPr>
         </p:nvSpPr>
-        <p:spPr/>
+        <p:spPr>
+          <a:xfrm>
+            <a:off x="0" y="0"/>
+            <a:ext cx="0" cy="0"/>
+          </a:xfrm>
+        </p:spPr>
         <p:txBody>
           <a:bodyPr/>
           <a:lstStyle/>
           <a:p>
             <a:r>
-              <a:rPr lang="en-US"/>
+              <a:rPr lang="en-US" dirty="0"/>
               <a:t>ESTP Training. JD+ Overview</a:t>
             </a:r>
           </a:p>
@@ -7643,18 +7734,48 @@
       </p:sp>
       <p:sp>
         <p:nvSpPr>
+          <p:cNvPr id="4" name="Espace réservé du numéro de diapositive 3">
+            <a:extLst>
+              <a:ext uri="{FF2B5EF4-FFF2-40B4-BE49-F238E27FC236}">
+                <a16:creationId xmlns:a16="http://schemas.microsoft.com/office/drawing/2014/main" id="{B218ADDD-2ED6-CCCA-441B-20C772B2CFCC}"/>
+              </a:ext>
+            </a:extLst>
+          </p:cNvPr>
+          <p:cNvSpPr>
+            <a:spLocks noGrp="1"/>
+          </p:cNvSpPr>
+          <p:nvPr>
+            <p:ph type="sldNum" idx="12"/>
+          </p:nvPr>
+        </p:nvSpPr>
+        <p:spPr/>
+        <p:txBody>
+          <a:bodyPr/>
+          <a:lstStyle/>
+          <a:p>
+            <a:fld id="{627CDA0C-01AE-4E2F-8829-AAF8EAAF9DB3}" type="slidenum">
+              <a:rPr lang="en-US" smtClean="0"/>
+              <a:pPr/>
+              <a:t>4</a:t>
+            </a:fld>
+            <a:endParaRPr lang="en-US" dirty="0"/>
+          </a:p>
+        </p:txBody>
+      </p:sp>
+      <p:sp>
+        <p:nvSpPr>
           <p:cNvPr id="3" name="Content Placeholder 2"/>
           <p:cNvSpPr>
             <a:spLocks noGrp="1"/>
           </p:cNvSpPr>
           <p:nvPr>
-            <p:ph idx="1"/>
+            <p:ph sz="half" idx="2"/>
           </p:nvPr>
         </p:nvSpPr>
         <p:spPr/>
         <p:txBody>
           <a:bodyPr>
-            <a:normAutofit fontScale="77500" lnSpcReduction="20000"/>
+            <a:normAutofit fontScale="92500" lnSpcReduction="10000"/>
           </a:bodyPr>
           <a:lstStyle/>
           <a:p>
@@ -7730,16 +7851,21 @@
             <a:spLocks noGrp="1"/>
           </p:cNvSpPr>
           <p:nvPr>
-            <p:ph type="ftr" sz="quarter" idx="11"/>
+            <p:ph type="ftr" sz="quarter" idx="4294967295"/>
           </p:nvPr>
         </p:nvSpPr>
-        <p:spPr/>
+        <p:spPr>
+          <a:xfrm>
+            <a:off x="0" y="0"/>
+            <a:ext cx="0" cy="0"/>
+          </a:xfrm>
+        </p:spPr>
         <p:txBody>
           <a:bodyPr/>
           <a:lstStyle/>
           <a:p>
             <a:r>
-              <a:rPr lang="en-US"/>
+              <a:rPr lang="en-US" dirty="0"/>
               <a:t>ESTP Training. JD+ Overview</a:t>
             </a:r>
           </a:p>
@@ -8198,12 +8324,7 @@
             <p:ph type="title"/>
           </p:nvPr>
         </p:nvSpPr>
-        <p:spPr>
-          <a:xfrm>
-            <a:off x="1775519" y="188641"/>
-            <a:ext cx="5295131" cy="663575"/>
-          </a:xfrm>
-        </p:spPr>
+        <p:spPr/>
         <p:txBody>
           <a:bodyPr>
             <a:normAutofit/>
@@ -8213,6 +8334,88 @@
             <a:r>
               <a:rPr lang="en-GB" dirty="0"/>
               <a:t>2.1 What is JD+ (I) ?</a:t>
+            </a:r>
+          </a:p>
+        </p:txBody>
+      </p:sp>
+      <p:sp>
+        <p:nvSpPr>
+          <p:cNvPr id="3" name="Espace réservé du numéro de diapositive 2">
+            <a:extLst>
+              <a:ext uri="{FF2B5EF4-FFF2-40B4-BE49-F238E27FC236}">
+                <a16:creationId xmlns:a16="http://schemas.microsoft.com/office/drawing/2014/main" id="{BBFFDA69-F465-9604-9A64-EE41E32F55CF}"/>
+              </a:ext>
+            </a:extLst>
+          </p:cNvPr>
+          <p:cNvSpPr>
+            <a:spLocks noGrp="1"/>
+          </p:cNvSpPr>
+          <p:nvPr>
+            <p:ph type="sldNum" idx="12"/>
+          </p:nvPr>
+        </p:nvSpPr>
+        <p:spPr/>
+        <p:txBody>
+          <a:bodyPr/>
+          <a:lstStyle/>
+          <a:p>
+            <a:fld id="{627CDA0C-01AE-4E2F-8829-AAF8EAAF9DB3}" type="slidenum">
+              <a:rPr lang="en-US" smtClean="0"/>
+              <a:pPr/>
+              <a:t>5</a:t>
+            </a:fld>
+            <a:endParaRPr lang="en-US" dirty="0"/>
+          </a:p>
+        </p:txBody>
+      </p:sp>
+      <p:sp>
+        <p:nvSpPr>
+          <p:cNvPr id="8" name="Espace réservé du contenu 7">
+            <a:extLst>
+              <a:ext uri="{FF2B5EF4-FFF2-40B4-BE49-F238E27FC236}">
+                <a16:creationId xmlns:a16="http://schemas.microsoft.com/office/drawing/2014/main" id="{8215657A-D3BB-D3EA-2889-DB897CBDFC8D}"/>
+              </a:ext>
+            </a:extLst>
+          </p:cNvPr>
+          <p:cNvSpPr>
+            <a:spLocks noGrp="1"/>
+          </p:cNvSpPr>
+          <p:nvPr>
+            <p:ph sz="half" idx="2"/>
+          </p:nvPr>
+        </p:nvSpPr>
+        <p:spPr/>
+        <p:txBody>
+          <a:bodyPr/>
+          <a:lstStyle/>
+          <a:p>
+            <a:endParaRPr lang="en-GB"/>
+          </a:p>
+        </p:txBody>
+      </p:sp>
+      <p:sp>
+        <p:nvSpPr>
+          <p:cNvPr id="4" name="Footer Placeholder 3"/>
+          <p:cNvSpPr>
+            <a:spLocks noGrp="1"/>
+          </p:cNvSpPr>
+          <p:nvPr>
+            <p:ph type="ftr" sz="quarter" idx="4294967295"/>
+          </p:nvPr>
+        </p:nvSpPr>
+        <p:spPr>
+          <a:xfrm>
+            <a:off x="0" y="0"/>
+            <a:ext cx="0" cy="0"/>
+          </a:xfrm>
+        </p:spPr>
+        <p:txBody>
+          <a:bodyPr/>
+          <a:lstStyle/>
+          <a:p>
+            <a:r>
+              <a:rPr lang="en-US" dirty="0"/>
+              <a:t>ESTP Training. JD+ Overview</a:t>
             </a:r>
           </a:p>
         </p:txBody>
@@ -8285,29 +8488,6 @@
               </a:rPr>
               <a:t>Advanced Java toolkit for time series (SA) processing (IT-teams, researchers)</a:t>
             </a:r>
-          </a:p>
-        </p:txBody>
-      </p:sp>
-      <p:sp>
-        <p:nvSpPr>
-          <p:cNvPr id="4" name="Footer Placeholder 3"/>
-          <p:cNvSpPr>
-            <a:spLocks noGrp="1"/>
-          </p:cNvSpPr>
-          <p:nvPr>
-            <p:ph type="ftr" sz="quarter" idx="11"/>
-          </p:nvPr>
-        </p:nvSpPr>
-        <p:spPr/>
-        <p:txBody>
-          <a:bodyPr/>
-          <a:lstStyle/>
-          <a:p>
-            <a:r>
-              <a:rPr lang="en-US"/>
-              <a:t>ESTP Training. JD+ Overview</a:t>
-            </a:r>
-            <a:endParaRPr lang="en-US" dirty="0"/>
           </a:p>
         </p:txBody>
       </p:sp>
@@ -8524,21 +8704,73 @@
             <p:ph type="title"/>
           </p:nvPr>
         </p:nvSpPr>
+        <p:spPr/>
+        <p:txBody>
+          <a:bodyPr>
+            <a:normAutofit/>
+          </a:bodyPr>
+          <a:lstStyle/>
+          <a:p>
+            <a:r>
+              <a:rPr lang="en-GB" dirty="0"/>
+              <a:t>2.2 What is JD+ ? (II)</a:t>
+            </a:r>
+          </a:p>
+        </p:txBody>
+      </p:sp>
+      <p:sp>
+        <p:nvSpPr>
+          <p:cNvPr id="4" name="Espace réservé du numéro de diapositive 3">
+            <a:extLst>
+              <a:ext uri="{FF2B5EF4-FFF2-40B4-BE49-F238E27FC236}">
+                <a16:creationId xmlns:a16="http://schemas.microsoft.com/office/drawing/2014/main" id="{5E3CFBD3-21EF-C2D9-1BBC-B3F4A66DF797}"/>
+              </a:ext>
+            </a:extLst>
+          </p:cNvPr>
+          <p:cNvSpPr>
+            <a:spLocks noGrp="1"/>
+          </p:cNvSpPr>
+          <p:nvPr>
+            <p:ph type="sldNum" idx="12"/>
+          </p:nvPr>
+        </p:nvSpPr>
+        <p:spPr/>
+        <p:txBody>
+          <a:bodyPr/>
+          <a:lstStyle/>
+          <a:p>
+            <a:fld id="{627CDA0C-01AE-4E2F-8829-AAF8EAAF9DB3}" type="slidenum">
+              <a:rPr lang="en-US" smtClean="0"/>
+              <a:pPr/>
+              <a:t>6</a:t>
+            </a:fld>
+            <a:endParaRPr lang="en-US" dirty="0"/>
+          </a:p>
+        </p:txBody>
+      </p:sp>
+      <p:sp>
+        <p:nvSpPr>
+          <p:cNvPr id="6" name="Footer Placeholder 5"/>
+          <p:cNvSpPr>
+            <a:spLocks noGrp="1"/>
+          </p:cNvSpPr>
+          <p:nvPr>
+            <p:ph type="ftr" sz="quarter" idx="4294967295"/>
+          </p:nvPr>
+        </p:nvSpPr>
         <p:spPr>
           <a:xfrm>
-            <a:off x="2120900" y="284164"/>
-            <a:ext cx="4839196" cy="663575"/>
+            <a:off x="0" y="0"/>
+            <a:ext cx="0" cy="0"/>
           </a:xfrm>
         </p:spPr>
         <p:txBody>
-          <a:bodyPr>
-            <a:normAutofit fontScale="90000"/>
-          </a:bodyPr>
+          <a:bodyPr/>
           <a:lstStyle/>
           <a:p>
             <a:r>
-              <a:rPr lang="en-GB" dirty="0"/>
-              <a:t>2.2 What is JD+ ? (II)</a:t>
+              <a:rPr lang="en-US" dirty="0"/>
+              <a:t>ESTP Training. JD+ Overview</a:t>
             </a:r>
           </a:p>
         </p:txBody>
@@ -8610,25 +8842,8 @@
                   </a:schemeClr>
                 </a:solidFill>
               </a:rPr>
-              <a:t> Supported by </a:t>
-            </a:r>
-            <a:r>
-              <a:rPr lang="en-GB" sz="1800" dirty="0" err="1">
-                <a:solidFill>
-                  <a:schemeClr val="bg2">
-                    <a:lumMod val="50000"/>
-                  </a:schemeClr>
-                </a:solidFill>
-              </a:rPr>
-              <a:t>Eurostat</a:t>
-            </a:r>
-            <a:endParaRPr lang="en-GB" sz="1800" dirty="0">
-              <a:solidFill>
-                <a:schemeClr val="bg2">
-                  <a:lumMod val="50000"/>
-                </a:schemeClr>
-              </a:solidFill>
-            </a:endParaRPr>
+              <a:t> Supported by Eurostat</a:t>
+            </a:r>
           </a:p>
           <a:p>
             <a:pPr>
@@ -8758,24 +8973,14 @@
               <a:buChar char="•"/>
             </a:pPr>
             <a:r>
-              <a:rPr lang="en-GB" sz="1800" dirty="0" err="1">
+              <a:rPr lang="en-GB" sz="1800" dirty="0">
                 <a:solidFill>
                   <a:schemeClr val="bg2">
                     <a:lumMod val="50000"/>
                   </a:schemeClr>
                 </a:solidFill>
               </a:rPr>
-              <a:t>Tramo</a:t>
-            </a:r>
-            <a:r>
-              <a:rPr lang="en-GB" sz="1800" dirty="0">
-                <a:solidFill>
-                  <a:schemeClr val="bg2">
-                    <a:lumMod val="50000"/>
-                  </a:schemeClr>
-                </a:solidFill>
-              </a:rPr>
-              <a:t>-Seats (BDE)</a:t>
+              <a:t>Tramo-Seats (BDE)</a:t>
             </a:r>
           </a:p>
           <a:p>
@@ -8849,29 +9054,6 @@
                 </a:schemeClr>
               </a:solidFill>
             </a:endParaRPr>
-          </a:p>
-        </p:txBody>
-      </p:sp>
-      <p:sp>
-        <p:nvSpPr>
-          <p:cNvPr id="6" name="Footer Placeholder 5"/>
-          <p:cNvSpPr>
-            <a:spLocks noGrp="1"/>
-          </p:cNvSpPr>
-          <p:nvPr>
-            <p:ph type="ftr" sz="quarter" idx="11"/>
-          </p:nvPr>
-        </p:nvSpPr>
-        <p:spPr/>
-        <p:txBody>
-          <a:bodyPr/>
-          <a:lstStyle/>
-          <a:p>
-            <a:r>
-              <a:rPr lang="en-US"/>
-              <a:t>ESTP Training. JD+ Overview</a:t>
-            </a:r>
-            <a:endParaRPr lang="en-US" dirty="0"/>
           </a:p>
         </p:txBody>
       </p:sp>
@@ -8966,6 +9148,64 @@
       </p:sp>
       <p:sp>
         <p:nvSpPr>
+          <p:cNvPr id="4" name="Espace réservé du numéro de diapositive 3">
+            <a:extLst>
+              <a:ext uri="{FF2B5EF4-FFF2-40B4-BE49-F238E27FC236}">
+                <a16:creationId xmlns:a16="http://schemas.microsoft.com/office/drawing/2014/main" id="{136EBA0A-99E3-6302-D12E-7E43E6E04A8B}"/>
+              </a:ext>
+            </a:extLst>
+          </p:cNvPr>
+          <p:cNvSpPr>
+            <a:spLocks noGrp="1"/>
+          </p:cNvSpPr>
+          <p:nvPr>
+            <p:ph type="sldNum" idx="12"/>
+          </p:nvPr>
+        </p:nvSpPr>
+        <p:spPr/>
+        <p:txBody>
+          <a:bodyPr/>
+          <a:lstStyle/>
+          <a:p>
+            <a:fld id="{627CDA0C-01AE-4E2F-8829-AAF8EAAF9DB3}" type="slidenum">
+              <a:rPr lang="en-US" smtClean="0"/>
+              <a:pPr/>
+              <a:t>7</a:t>
+            </a:fld>
+            <a:endParaRPr lang="en-US" dirty="0"/>
+          </a:p>
+        </p:txBody>
+      </p:sp>
+      <p:sp>
+        <p:nvSpPr>
+          <p:cNvPr id="27" name="Footer Placeholder 26"/>
+          <p:cNvSpPr>
+            <a:spLocks noGrp="1"/>
+          </p:cNvSpPr>
+          <p:nvPr>
+            <p:ph type="ftr" sz="quarter" idx="4294967295"/>
+          </p:nvPr>
+        </p:nvSpPr>
+        <p:spPr>
+          <a:xfrm>
+            <a:off x="0" y="0"/>
+            <a:ext cx="0" cy="0"/>
+          </a:xfrm>
+        </p:spPr>
+        <p:txBody>
+          <a:bodyPr/>
+          <a:lstStyle/>
+          <a:p>
+            <a:r>
+              <a:rPr lang="en-US"/>
+              <a:t>ESTP Training. JD+ Overview</a:t>
+            </a:r>
+            <a:endParaRPr lang="en-US" dirty="0"/>
+          </a:p>
+        </p:txBody>
+      </p:sp>
+      <p:sp>
+        <p:nvSpPr>
           <p:cNvPr id="3" name="Rectangle 23"/>
           <p:cNvSpPr>
             <a:spLocks noChangeArrowheads="1"/>
@@ -9024,29 +9264,6 @@
           <a:lstStyle/>
           <a:p>
             <a:endParaRPr lang="en-US"/>
-          </a:p>
-        </p:txBody>
-      </p:sp>
-      <p:sp>
-        <p:nvSpPr>
-          <p:cNvPr id="27" name="Footer Placeholder 26"/>
-          <p:cNvSpPr>
-            <a:spLocks noGrp="1"/>
-          </p:cNvSpPr>
-          <p:nvPr>
-            <p:ph type="ftr" sz="quarter" idx="11"/>
-          </p:nvPr>
-        </p:nvSpPr>
-        <p:spPr/>
-        <p:txBody>
-          <a:bodyPr/>
-          <a:lstStyle/>
-          <a:p>
-            <a:r>
-              <a:rPr lang="en-US"/>
-              <a:t>ESTP Training. JD+ Overview</a:t>
-            </a:r>
-            <a:endParaRPr lang="en-US" dirty="0"/>
           </a:p>
         </p:txBody>
       </p:sp>
@@ -10898,20 +11115,72 @@
             <p:ph type="title"/>
           </p:nvPr>
         </p:nvSpPr>
+        <p:spPr/>
+        <p:txBody>
+          <a:bodyPr/>
+          <a:lstStyle/>
+          <a:p>
+            <a:pPr algn="l"/>
+            <a:r>
+              <a:rPr lang="en-GB" b="0" dirty="0"/>
+              <a:t>4. Seasonal adjustment framework</a:t>
+            </a:r>
+          </a:p>
+        </p:txBody>
+      </p:sp>
+      <p:sp>
+        <p:nvSpPr>
+          <p:cNvPr id="3" name="Espace réservé du numéro de diapositive 2">
+            <a:extLst>
+              <a:ext uri="{FF2B5EF4-FFF2-40B4-BE49-F238E27FC236}">
+                <a16:creationId xmlns:a16="http://schemas.microsoft.com/office/drawing/2014/main" id="{E3635438-27DE-EEBE-837C-53640DA3FD91}"/>
+              </a:ext>
+            </a:extLst>
+          </p:cNvPr>
+          <p:cNvSpPr>
+            <a:spLocks noGrp="1"/>
+          </p:cNvSpPr>
+          <p:nvPr>
+            <p:ph type="sldNum" idx="12"/>
+          </p:nvPr>
+        </p:nvSpPr>
+        <p:spPr/>
+        <p:txBody>
+          <a:bodyPr/>
+          <a:lstStyle/>
+          <a:p>
+            <a:fld id="{627CDA0C-01AE-4E2F-8829-AAF8EAAF9DB3}" type="slidenum">
+              <a:rPr lang="en-US" smtClean="0"/>
+              <a:pPr/>
+              <a:t>8</a:t>
+            </a:fld>
+            <a:endParaRPr lang="en-US" dirty="0"/>
+          </a:p>
+        </p:txBody>
+      </p:sp>
+      <p:sp>
+        <p:nvSpPr>
+          <p:cNvPr id="6" name="Footer Placeholder 5"/>
+          <p:cNvSpPr>
+            <a:spLocks noGrp="1"/>
+          </p:cNvSpPr>
+          <p:nvPr>
+            <p:ph type="ftr" sz="quarter" idx="4294967295"/>
+          </p:nvPr>
+        </p:nvSpPr>
         <p:spPr>
           <a:xfrm>
-            <a:off x="1086824" y="-1087"/>
-            <a:ext cx="8229600" cy="1143000"/>
+            <a:off x="0" y="0"/>
+            <a:ext cx="0" cy="0"/>
           </a:xfrm>
         </p:spPr>
         <p:txBody>
           <a:bodyPr/>
           <a:lstStyle/>
           <a:p>
-            <a:pPr algn="l"/>
-            <a:r>
-              <a:rPr lang="en-GB" b="0" dirty="0"/>
-              <a:t>4. Seasonal adjustment framework</a:t>
+            <a:r>
+              <a:rPr lang="en-US"/>
+              <a:t>ESTP Training. JD+ Overview</a:t>
             </a:r>
           </a:p>
         </p:txBody>
@@ -12257,28 +12526,6 @@
           <a:effectLst/>
         </p:spPr>
       </p:cxnSp>
-      <p:sp>
-        <p:nvSpPr>
-          <p:cNvPr id="6" name="Footer Placeholder 5"/>
-          <p:cNvSpPr>
-            <a:spLocks noGrp="1"/>
-          </p:cNvSpPr>
-          <p:nvPr>
-            <p:ph type="ftr" sz="quarter" idx="11"/>
-          </p:nvPr>
-        </p:nvSpPr>
-        <p:spPr/>
-        <p:txBody>
-          <a:bodyPr/>
-          <a:lstStyle/>
-          <a:p>
-            <a:r>
-              <a:rPr lang="en-US"/>
-              <a:t>ESTP Training. JD+ Overview</a:t>
-            </a:r>
-          </a:p>
-        </p:txBody>
-      </p:sp>
     </p:spTree>
     <p:extLst>
       <p:ext uri="{BB962C8B-B14F-4D97-AF65-F5344CB8AC3E}">
@@ -12888,12 +13135,42 @@
       </p:sp>
       <p:sp>
         <p:nvSpPr>
+          <p:cNvPr id="4" name="Espace réservé du numéro de diapositive 3">
+            <a:extLst>
+              <a:ext uri="{FF2B5EF4-FFF2-40B4-BE49-F238E27FC236}">
+                <a16:creationId xmlns:a16="http://schemas.microsoft.com/office/drawing/2014/main" id="{5FEE7FC5-426E-3588-D14D-4D17FC4B3ADA}"/>
+              </a:ext>
+            </a:extLst>
+          </p:cNvPr>
+          <p:cNvSpPr>
+            <a:spLocks noGrp="1"/>
+          </p:cNvSpPr>
+          <p:nvPr>
+            <p:ph type="sldNum" idx="12"/>
+          </p:nvPr>
+        </p:nvSpPr>
+        <p:spPr/>
+        <p:txBody>
+          <a:bodyPr/>
+          <a:lstStyle/>
+          <a:p>
+            <a:fld id="{627CDA0C-01AE-4E2F-8829-AAF8EAAF9DB3}" type="slidenum">
+              <a:rPr lang="en-US" smtClean="0"/>
+              <a:pPr/>
+              <a:t>9</a:t>
+            </a:fld>
+            <a:endParaRPr lang="en-US" dirty="0"/>
+          </a:p>
+        </p:txBody>
+      </p:sp>
+      <p:sp>
+        <p:nvSpPr>
           <p:cNvPr id="3" name="Content Placeholder 2"/>
           <p:cNvSpPr>
             <a:spLocks noGrp="1"/>
           </p:cNvSpPr>
           <p:nvPr>
-            <p:ph idx="1"/>
+            <p:ph sz="half" idx="2"/>
           </p:nvPr>
         </p:nvSpPr>
         <p:spPr/>
@@ -12904,33 +13181,33 @@
           <a:lstStyle/>
           <a:p>
             <a:r>
-              <a:rPr lang="en-GB" dirty="0"/>
+              <a:rPr lang="en-GB" sz="2400" dirty="0"/>
               <a:t>JD+ is a complete re-factoring of </a:t>
             </a:r>
             <a:r>
-              <a:rPr lang="en-GB" dirty="0" err="1"/>
+              <a:rPr lang="en-GB" sz="2400" dirty="0" err="1"/>
               <a:t>Tramo</a:t>
             </a:r>
             <a:r>
-              <a:rPr lang="en-GB" dirty="0"/>
+              <a:rPr lang="en-GB" sz="2400" dirty="0"/>
               <a:t>-Seats and of X12-Arima in an open OO framework. In some cases, the new algorithms may lead to (usually slightly) different results .</a:t>
             </a:r>
           </a:p>
           <a:p>
-            <a:endParaRPr lang="en-GB" dirty="0"/>
-          </a:p>
-          <a:p>
-            <a:r>
-              <a:rPr lang="en-GB" dirty="0"/>
+            <a:endParaRPr lang="en-GB" sz="2400" dirty="0"/>
+          </a:p>
+          <a:p>
+            <a:r>
+              <a:rPr lang="en-GB" sz="2400" dirty="0"/>
               <a:t>JD+ is also designed for the handling of related time series problems, especially through a rich state space library.</a:t>
             </a:r>
           </a:p>
           <a:p>
-            <a:endParaRPr lang="en-GB" dirty="0"/>
-          </a:p>
-          <a:p>
-            <a:r>
-              <a:rPr lang="en-GB" dirty="0"/>
+            <a:endParaRPr lang="en-GB" sz="2400" dirty="0"/>
+          </a:p>
+          <a:p>
+            <a:r>
+              <a:rPr lang="en-GB" sz="2400" dirty="0"/>
               <a:t>By developing it as an open-source solution, we have tried to create an environment appropriate to external collaborations.</a:t>
             </a:r>
           </a:p>
@@ -12946,10 +13223,15 @@
             <a:spLocks noGrp="1"/>
           </p:cNvSpPr>
           <p:nvPr>
-            <p:ph type="ftr" sz="quarter" idx="11"/>
+            <p:ph type="ftr" sz="quarter" idx="4294967295"/>
           </p:nvPr>
         </p:nvSpPr>
-        <p:spPr/>
+        <p:spPr>
+          <a:xfrm>
+            <a:off x="0" y="0"/>
+            <a:ext cx="0" cy="0"/>
+          </a:xfrm>
+        </p:spPr>
         <p:txBody>
           <a:bodyPr/>
           <a:lstStyle/>
@@ -14021,17 +14303,6 @@
 </file>
 
 <file path=customXml/item1.xml><?xml version="1.0" encoding="utf-8"?>
-<p:properties xmlns:p="http://schemas.microsoft.com/office/2006/metadata/properties" xmlns:xsi="http://www.w3.org/2001/XMLSchema-instance" xmlns:pc="http://schemas.microsoft.com/office/infopath/2007/PartnerControls">
-  <documentManagement>
-    <lcf76f155ced4ddcb4097134ff3c332f xmlns="0e422b70-e85d-4377-8ee0-b6227433d381">
-      <Terms xmlns="http://schemas.microsoft.com/office/infopath/2007/PartnerControls"/>
-    </lcf76f155ced4ddcb4097134ff3c332f>
-    <TaxCatchAll xmlns="199f642e-5af9-486c-ac06-f366742ef41a"/>
-  </documentManagement>
-</p:properties>
-</file>
-
-<file path=customXml/item2.xml><?xml version="1.0" encoding="utf-8"?>
 <ct:contentTypeSchema xmlns:ct="http://schemas.microsoft.com/office/2006/metadata/contentType" xmlns:ma="http://schemas.microsoft.com/office/2006/metadata/properties/metaAttributes" ct:_="" ma:_="" ma:contentTypeName="Document" ma:contentTypeID="0x010100E6AA5C57F8EADE4E9CD6BB064C0C3195" ma:contentTypeVersion="16" ma:contentTypeDescription="Create a new document." ma:contentTypeScope="" ma:versionID="bb51c19a58f458ddcddd050a07659236">
   <xsd:schema xmlns:xsd="http://www.w3.org/2001/XMLSchema" xmlns:xs="http://www.w3.org/2001/XMLSchema" xmlns:p="http://schemas.microsoft.com/office/2006/metadata/properties" xmlns:ns2="0e422b70-e85d-4377-8ee0-b6227433d381" xmlns:ns3="199f642e-5af9-486c-ac06-f366742ef41a" targetNamespace="http://schemas.microsoft.com/office/2006/metadata/properties" ma:root="true" ma:fieldsID="0ee7a3bac0352a48a43420936abd968a" ns2:_="" ns3:_="">
     <xsd:import namespace="0e422b70-e85d-4377-8ee0-b6227433d381"/>
@@ -14272,6 +14543,17 @@
 </ct:contentTypeSchema>
 </file>
 
+<file path=customXml/item2.xml><?xml version="1.0" encoding="utf-8"?>
+<p:properties xmlns:p="http://schemas.microsoft.com/office/2006/metadata/properties" xmlns:xsi="http://www.w3.org/2001/XMLSchema-instance" xmlns:pc="http://schemas.microsoft.com/office/infopath/2007/PartnerControls">
+  <documentManagement>
+    <lcf76f155ced4ddcb4097134ff3c332f xmlns="0e422b70-e85d-4377-8ee0-b6227433d381">
+      <Terms xmlns="http://schemas.microsoft.com/office/infopath/2007/PartnerControls"/>
+    </lcf76f155ced4ddcb4097134ff3c332f>
+    <TaxCatchAll xmlns="199f642e-5af9-486c-ac06-f366742ef41a"/>
+  </documentManagement>
+</p:properties>
+</file>
+
 <file path=customXml/item3.xml><?xml version="1.0" encoding="utf-8"?>
 <?mso-contentType ?>
 <FormTemplates xmlns="http://schemas.microsoft.com/sharepoint/v3/contenttype/forms">
@@ -14282,23 +14564,6 @@
 </file>
 
 <file path=customXml/itemProps1.xml><?xml version="1.0" encoding="utf-8"?>
-<ds:datastoreItem xmlns:ds="http://schemas.openxmlformats.org/officeDocument/2006/customXml" ds:itemID="{2D6C293B-B8B4-4284-A17E-9F9E4C32B25A}">
-  <ds:schemaRefs>
-    <ds:schemaRef ds:uri="http://schemas.microsoft.com/office/2006/documentManagement/types"/>
-    <ds:schemaRef ds:uri="http://purl.org/dc/elements/1.1/"/>
-    <ds:schemaRef ds:uri="http://purl.org/dc/terms/"/>
-    <ds:schemaRef ds:uri="http://purl.org/dc/dcmitype/"/>
-    <ds:schemaRef ds:uri="0e422b70-e85d-4377-8ee0-b6227433d381"/>
-    <ds:schemaRef ds:uri="http://schemas.microsoft.com/office/infopath/2007/PartnerControls"/>
-    <ds:schemaRef ds:uri="199f642e-5af9-486c-ac06-f366742ef41a"/>
-    <ds:schemaRef ds:uri="http://schemas.openxmlformats.org/package/2006/metadata/core-properties"/>
-    <ds:schemaRef ds:uri="http://schemas.microsoft.com/office/2006/metadata/properties"/>
-    <ds:schemaRef ds:uri="http://www.w3.org/XML/1998/namespace"/>
-  </ds:schemaRefs>
-</ds:datastoreItem>
-</file>
-
-<file path=customXml/itemProps2.xml><?xml version="1.0" encoding="utf-8"?>
 <ds:datastoreItem xmlns:ds="http://schemas.openxmlformats.org/officeDocument/2006/customXml" ds:itemID="{04B464EA-1576-49DD-9675-1E3399D4D196}">
   <ds:schemaRefs>
     <ds:schemaRef ds:uri="http://schemas.microsoft.com/office/2006/metadata/contentType"/>
@@ -14317,6 +14582,23 @@
 </ds:datastoreItem>
 </file>
 
+<file path=customXml/itemProps2.xml><?xml version="1.0" encoding="utf-8"?>
+<ds:datastoreItem xmlns:ds="http://schemas.openxmlformats.org/officeDocument/2006/customXml" ds:itemID="{2D6C293B-B8B4-4284-A17E-9F9E4C32B25A}">
+  <ds:schemaRefs>
+    <ds:schemaRef ds:uri="http://schemas.microsoft.com/office/2006/documentManagement/types"/>
+    <ds:schemaRef ds:uri="http://purl.org/dc/elements/1.1/"/>
+    <ds:schemaRef ds:uri="http://purl.org/dc/terms/"/>
+    <ds:schemaRef ds:uri="http://purl.org/dc/dcmitype/"/>
+    <ds:schemaRef ds:uri="0e422b70-e85d-4377-8ee0-b6227433d381"/>
+    <ds:schemaRef ds:uri="http://schemas.microsoft.com/office/infopath/2007/PartnerControls"/>
+    <ds:schemaRef ds:uri="199f642e-5af9-486c-ac06-f366742ef41a"/>
+    <ds:schemaRef ds:uri="http://schemas.openxmlformats.org/package/2006/metadata/core-properties"/>
+    <ds:schemaRef ds:uri="http://schemas.microsoft.com/office/2006/metadata/properties"/>
+    <ds:schemaRef ds:uri="http://www.w3.org/XML/1998/namespace"/>
+  </ds:schemaRefs>
+</ds:datastoreItem>
+</file>
+
 <file path=customXml/itemProps3.xml><?xml version="1.0" encoding="utf-8"?>
 <ds:datastoreItem xmlns:ds="http://schemas.openxmlformats.org/officeDocument/2006/customXml" ds:itemID="{67DD9E9F-9EEB-4105-B29B-819486C2855A}">
   <ds:schemaRefs>
